--- a/dataset/guides_final/SYS/manual/IT-SYS-004-M_메일 이용 장애 처리 매뉴얼.pptx
+++ b/dataset/guides_final/SYS/manual/IT-SYS-004-M_메일 이용 장애 처리 매뉴얼.pptx
@@ -25360,7 +25360,7 @@
                 <a:ea typeface="Malgun Gothic"/>
                 <a:cs typeface="Malgun Gothic"/>
               </a:rPr>
-              <a:t>티켓: 담당자 조치가 필요한 건. 담당팀에 배정하고 상태를 RDY → IP → FIN → CLS 으로 관리한다.</a:t>
+              <a:t>티켓: 담당자 조치가 필요한 건. 담당팀에 배정하고 상태를 RDY → WIP → FIN → CLS 으로 관리한다.</a:t>
             </a:r>
           </a:p>
         </p:txBody>

--- a/dataset/guides_final/SYS/manual/IT-SYS-004-M_메일 이용 장애 처리 매뉴얼.pptx
+++ b/dataset/guides_final/SYS/manual/IT-SYS-004-M_메일 이용 장애 처리 매뉴얼.pptx
@@ -3233,7 +3233,7 @@
                 <a:ea typeface="Malgun Gothic"/>
                 <a:cs typeface="Malgun Gothic"/>
               </a:rPr>
-              <a:t>한화시스템 ICT IT 담당자 매뉴얼 · 사내 시스템</a:t>
+              <a:t>가상 ICT 기업 IT 담당자 매뉴얼 · 사내 시스템</a:t>
             </a:r>
           </a:p>
         </p:txBody>
@@ -3512,7 +3512,7 @@
                 <a:ea typeface="Malgun Gothic"/>
                 <a:cs typeface="Malgun Gothic"/>
               </a:rPr>
-              <a:t>© HANWHA SYSTEMS ICT · IT-SYS-004-M · 사내 제한</a:t>
+              <a:t>© 가상 ICT 기업 · IT-SYS-004-M · 사내 제한</a:t>
             </a:r>
           </a:p>
         </p:txBody>
@@ -6152,7 +6152,7 @@
                 <a:ea typeface="Malgun Gothic"/>
                 <a:cs typeface="Malgun Gothic"/>
               </a:rPr>
-              <a:t>© HANWHA SYSTEMS ICT · IT-SYS-004-M · 사내 제한</a:t>
+              <a:t>© 가상 ICT 기업 · IT-SYS-004-M · 사내 제한</a:t>
             </a:r>
           </a:p>
         </p:txBody>
@@ -8674,7 +8674,7 @@
                 <a:ea typeface="Malgun Gothic"/>
                 <a:cs typeface="Malgun Gothic"/>
               </a:rPr>
-              <a:t>© HANWHA SYSTEMS ICT · IT-SYS-004-M · 사내 제한</a:t>
+              <a:t>© 가상 ICT 기업 · IT-SYS-004-M · 사내 제한</a:t>
             </a:r>
           </a:p>
         </p:txBody>
@@ -11290,7 +11290,7 @@
                 <a:ea typeface="Malgun Gothic"/>
                 <a:cs typeface="Malgun Gothic"/>
               </a:rPr>
-              <a:t>© HANWHA SYSTEMS ICT · IT-SYS-004-M · 사내 제한</a:t>
+              <a:t>© 가상 ICT 기업 · IT-SYS-004-M · 사내 제한</a:t>
             </a:r>
           </a:p>
         </p:txBody>
@@ -14094,7 +14094,7 @@
                 <a:ea typeface="Malgun Gothic"/>
                 <a:cs typeface="Malgun Gothic"/>
               </a:rPr>
-              <a:t>© HANWHA SYSTEMS ICT · IT-SYS-004-M · 사내 제한</a:t>
+              <a:t>© 가상 ICT 기업 · IT-SYS-004-M · 사내 제한</a:t>
             </a:r>
           </a:p>
         </p:txBody>
@@ -14342,7 +14342,7 @@
                 <a:ea typeface="Malgun Gothic"/>
                 <a:cs typeface="Malgun Gothic"/>
               </a:rPr>
-              <a:t>© HANWHA SYSTEMS ICT · IT-SYS-004-M · 사내 제한</a:t>
+              <a:t>© 가상 ICT 기업 · IT-SYS-004-M · 사내 제한</a:t>
             </a:r>
           </a:p>
         </p:txBody>
@@ -15001,7 +15001,7 @@
                 <a:ea typeface="Malgun Gothic"/>
                 <a:cs typeface="Malgun Gothic"/>
               </a:rPr>
-              <a:t>© HANWHA SYSTEMS ICT · IT-SYS-004-M · 사내 제한</a:t>
+              <a:t>© 가상 ICT 기업 · IT-SYS-004-M · 사내 제한</a:t>
             </a:r>
           </a:p>
         </p:txBody>
@@ -15249,7 +15249,7 @@
                 <a:ea typeface="Malgun Gothic"/>
                 <a:cs typeface="Malgun Gothic"/>
               </a:rPr>
-              <a:t>© HANWHA SYSTEMS ICT · IT-SYS-004-M · 사내 제한</a:t>
+              <a:t>© 가상 ICT 기업 · IT-SYS-004-M · 사내 제한</a:t>
             </a:r>
           </a:p>
         </p:txBody>
@@ -16277,7 +16277,7 @@
                 <a:ea typeface="Malgun Gothic"/>
                 <a:cs typeface="Malgun Gothic"/>
               </a:rPr>
-              <a:t>© HANWHA SYSTEMS ICT · IT-SYS-004-M · 사내 제한</a:t>
+              <a:t>© 가상 ICT 기업 · IT-SYS-004-M · 사내 제한</a:t>
             </a:r>
           </a:p>
         </p:txBody>
@@ -16525,7 +16525,7 @@
                 <a:ea typeface="Malgun Gothic"/>
                 <a:cs typeface="Malgun Gothic"/>
               </a:rPr>
-              <a:t>© HANWHA SYSTEMS ICT · IT-SYS-004-M · 사내 제한</a:t>
+              <a:t>© 가상 ICT 기업 · IT-SYS-004-M · 사내 제한</a:t>
             </a:r>
           </a:p>
         </p:txBody>
@@ -17217,7 +17217,7 @@
                 <a:ea typeface="Malgun Gothic"/>
                 <a:cs typeface="Malgun Gothic"/>
               </a:rPr>
-              <a:t>© HANWHA SYSTEMS ICT · IT-SYS-004-M · 사내 제한</a:t>
+              <a:t>© 가상 ICT 기업 · IT-SYS-004-M · 사내 제한</a:t>
             </a:r>
           </a:p>
         </p:txBody>
@@ -18860,7 +18860,7 @@
                 <a:ea typeface="Malgun Gothic"/>
                 <a:cs typeface="Malgun Gothic"/>
               </a:rPr>
-              <a:t>© HANWHA SYSTEMS ICT · IT-SYS-004-M · 사내 제한</a:t>
+              <a:t>© 가상 ICT 기업 · IT-SYS-004-M · 사내 제한</a:t>
             </a:r>
           </a:p>
         </p:txBody>
@@ -19837,7 +19837,7 @@
                 <a:ea typeface="Malgun Gothic"/>
                 <a:cs typeface="Malgun Gothic"/>
               </a:rPr>
-              <a:t>© HANWHA SYSTEMS ICT · IT-SYS-004-M · 사내 제한</a:t>
+              <a:t>© 가상 ICT 기업 · IT-SYS-004-M · 사내 제한</a:t>
             </a:r>
           </a:p>
         </p:txBody>
@@ -20983,7 +20983,7 @@
                 <a:ea typeface="Malgun Gothic"/>
                 <a:cs typeface="Malgun Gothic"/>
               </a:rPr>
-              <a:t>© HANWHA SYSTEMS ICT · IT-SYS-004-M · 사내 제한</a:t>
+              <a:t>© 가상 ICT 기업 · IT-SYS-004-M · 사내 제한</a:t>
             </a:r>
           </a:p>
         </p:txBody>
@@ -21231,7 +21231,7 @@
                 <a:ea typeface="Malgun Gothic"/>
                 <a:cs typeface="Malgun Gothic"/>
               </a:rPr>
-              <a:t>© HANWHA SYSTEMS ICT · IT-SYS-004-M · 사내 제한</a:t>
+              <a:t>© 가상 ICT 기업 · IT-SYS-004-M · 사내 제한</a:t>
             </a:r>
           </a:p>
         </p:txBody>
@@ -22241,7 +22241,7 @@
                 <a:ea typeface="Malgun Gothic"/>
                 <a:cs typeface="Malgun Gothic"/>
               </a:rPr>
-              <a:t>© HANWHA SYSTEMS ICT · IT-SYS-004-M · 사내 제한</a:t>
+              <a:t>© 가상 ICT 기업 · IT-SYS-004-M · 사내 제한</a:t>
             </a:r>
           </a:p>
         </p:txBody>
@@ -22489,7 +22489,7 @@
                 <a:ea typeface="Malgun Gothic"/>
                 <a:cs typeface="Malgun Gothic"/>
               </a:rPr>
-              <a:t>© HANWHA SYSTEMS ICT · IT-SYS-004-M · 사내 제한</a:t>
+              <a:t>© 가상 ICT 기업 · IT-SYS-004-M · 사내 제한</a:t>
             </a:r>
           </a:p>
         </p:txBody>
@@ -25736,7 +25736,7 @@
                 <a:ea typeface="Malgun Gothic"/>
                 <a:cs typeface="Malgun Gothic"/>
               </a:rPr>
-              <a:t>© HANWHA SYSTEMS ICT · IT-SYS-004-M · 사내 제한</a:t>
+              <a:t>© 가상 ICT 기업 · IT-SYS-004-M · 사내 제한</a:t>
             </a:r>
           </a:p>
         </p:txBody>
@@ -25984,7 +25984,7 @@
                 <a:ea typeface="Malgun Gothic"/>
                 <a:cs typeface="Malgun Gothic"/>
               </a:rPr>
-              <a:t>© HANWHA SYSTEMS ICT · IT-SYS-004-M · 사내 제한</a:t>
+              <a:t>© 가상 ICT 기업 · IT-SYS-004-M · 사내 제한</a:t>
             </a:r>
           </a:p>
         </p:txBody>
@@ -28718,7 +28718,7 @@
                 <a:ea typeface="Malgun Gothic"/>
                 <a:cs typeface="Malgun Gothic"/>
               </a:rPr>
-              <a:t>© HANWHA SYSTEMS ICT · IT-SYS-004-M · 사내 제한</a:t>
+              <a:t>© 가상 ICT 기업 · IT-SYS-004-M · 사내 제한</a:t>
             </a:r>
           </a:p>
         </p:txBody>
